--- a/it/slides/09-Architettura_dei_Calcolatori-Algebra_di_Boole_2-Lab.pptx
+++ b/it/slides/09-Architettura_dei_Calcolatori-Algebra_di_Boole_2-Lab.pptx
@@ -122,23 +122,23 @@
   <p:extLst>
     <p:ext uri="{521415D9-36F7-43E2-AB2F-B90AF26B5E84}">
       <p14:sectionLst xmlns:p14="http://schemas.microsoft.com/office/powerpoint/2010/main">
-        <p14:section name="Apertura" id="{777c9223-0d91-64c6-726d-103f048cc24a}">
+        <p14:section name="Apertura" id="{fbb73c56-1e59-2b1c-0498-7433213817d7}">
           <p14:sldIdLst>
             <p14:sldId id="256"/>
             <p14:sldId id="257"/>
           </p14:sldIdLst>
         </p14:section>
-        <p14:section name="Riscaldamento sulla macchina" id="{b7a3c2a1-7d1d-7096-ba8a-bcf7740db03e}">
+        <p14:section name="Riscaldamento sulla macchina" id="{fc9af018-ccbd-89d7-2ad3-7c505ba1bdae}">
           <p14:sldIdLst>
             <p14:sldId id="258"/>
           </p14:sldIdLst>
         </p14:section>
-        <p14:section name="Ritorno alla macchina" id="{a0466877-b02b-9857-c3c5-bc3b6dd0fba2}">
+        <p14:section name="Ritorno alla macchina" id="{ff0666b3-48be-e851-ce28-49890ddca5ed}">
           <p14:sldIdLst>
             <p14:sldId id="259"/>
           </p14:sldIdLst>
         </p14:section>
-        <p14:section name="Il programma completo" id="{52ebd440-b8f5-59db-218a-0bbaef956f77}">
+        <p14:section name="Il programma completo" id="{5c29703a-1714-3603-3103-37e3936b54bf}">
           <p14:sldIdLst>
             <p14:sldId id="260"/>
             <p14:sldId id="261"/>
@@ -148,7 +148,7 @@
             <p14:sldId id="265"/>
           </p14:sldIdLst>
         </p14:section>
-        <p14:section name="Eseguire e provare" id="{9216254d-46b0-0ea5-ee0c-3cbab40ab001}">
+        <p14:section name="Eseguire e provare" id="{d48499a7-0d8e-a414-ed15-18bbcb3191e7}">
           <p14:sldIdLst>
             <p14:sldId id="266"/>
             <p14:sldId id="267"/>
@@ -157,7 +157,7 @@
             <p14:sldId id="270"/>
           </p14:sldIdLst>
         </p14:section>
-        <p14:section name="Esercizi" id="{1f96b559-24cd-d6d4-d660-e4943a9737b9}">
+        <p14:section name="Esercizi" id="{3d4f5e5c-0116-c8f8-9148-5082db3b4c05}">
           <p14:sldIdLst>
             <p14:sldId id="271"/>
           </p14:sldIdLst>

--- a/it/slides/09-Architettura_dei_Calcolatori-Algebra_di_Boole_2-Lab.pptx
+++ b/it/slides/09-Architettura_dei_Calcolatori-Algebra_di_Boole_2-Lab.pptx
@@ -122,23 +122,23 @@
   <p:extLst>
     <p:ext uri="{521415D9-36F7-43E2-AB2F-B90AF26B5E84}">
       <p14:sectionLst xmlns:p14="http://schemas.microsoft.com/office/powerpoint/2010/main">
-        <p14:section name="Apertura" id="{fbb73c56-1e59-2b1c-0498-7433213817d7}">
+        <p14:section name="Apertura" id="{eb95e05d-279e-fcba-a15a-c22850e88fae}">
           <p14:sldIdLst>
             <p14:sldId id="256"/>
             <p14:sldId id="257"/>
           </p14:sldIdLst>
         </p14:section>
-        <p14:section name="Riscaldamento sulla macchina" id="{fc9af018-ccbd-89d7-2ad3-7c505ba1bdae}">
+        <p14:section name="Riscaldamento sulla macchina" id="{bba78687-5a6e-a4b3-90bc-0f0d2c3d1282}">
           <p14:sldIdLst>
             <p14:sldId id="258"/>
           </p14:sldIdLst>
         </p14:section>
-        <p14:section name="Ritorno alla macchina" id="{ff0666b3-48be-e851-ce28-49890ddca5ed}">
+        <p14:section name="Ritorno alla macchina" id="{e4da0f3d-c2af-7e6c-12ba-f994f7003015}">
           <p14:sldIdLst>
             <p14:sldId id="259"/>
           </p14:sldIdLst>
         </p14:section>
-        <p14:section name="Il programma completo" id="{5c29703a-1714-3603-3103-37e3936b54bf}">
+        <p14:section name="Il programma completo" id="{998e2169-9d40-80af-77c7-e3e9b8dabe5f}">
           <p14:sldIdLst>
             <p14:sldId id="260"/>
             <p14:sldId id="261"/>
@@ -148,7 +148,7 @@
             <p14:sldId id="265"/>
           </p14:sldIdLst>
         </p14:section>
-        <p14:section name="Eseguire e provare" id="{d48499a7-0d8e-a414-ed15-18bbcb3191e7}">
+        <p14:section name="Eseguire e provare" id="{945be0ac-2793-8979-d8a2-eeb54c21ae96}">
           <p14:sldIdLst>
             <p14:sldId id="266"/>
             <p14:sldId id="267"/>
@@ -157,7 +157,7 @@
             <p14:sldId id="270"/>
           </p14:sldIdLst>
         </p14:section>
-        <p14:section name="Esercizi" id="{3d4f5e5c-0116-c8f8-9148-5082db3b4c05}">
+        <p14:section name="Esercizi" id="{5f035adb-54ed-5537-34fb-7bf0539d0710}">
           <p14:sldIdLst>
             <p14:sldId id="271"/>
           </p14:sldIdLst>
@@ -568,7 +568,8 @@
               <a:rPr lang="en-US" dirty="0"/>
               <a:t>Questa è la presentazione del codice della Lezione 09. Mentre la presentazione della lezione sviluppa i concetti, questa raccoglie tutto ciò che si scrive e si esegue: ogni listato con il suo commento, il programma completo della lezione, il risultato che deve produrre, e la procedura per provarlo su ciascuno dei tre host. Le due presentazioni vanno lette insieme: i concetti spiegano il codice, e il codice dà ai concetti una conseguenza osservabile.
 Stato di apprendimento: DA COMPRENDERE OGGI, alla fine di questa lezione lo spiegate, lo seguite passo passo e lo applicate da soli; DA UTILIZZARE OGGI, oggi seguite e usate la ricetta; come funziona dentro si spiega più avanti, o non fa parte del corso; DA COMPRENDERE PIÙ AVANTI, riconoscete il nome e lo scopo; lo spiega una lezione successiva. Una slide senza etichetta è contesto: una storia, un esempio, una domanda, un esercizio.
-Stato di apprendimento di questa lezione. DA COMPRENDERE OGGI: il sommatore; le funzioni booleane; le forme canoniche; minimizzazione, Karnaugh. DA UTILIZZARE OGGI: il programma completo, gli strumenti di PRG32 (si usa, non si studia, in questo corso). DA COMPRENDERE PIÙ AVANTI: niente. Una slide senza etichetta è contesto: una storia, un esempio, una domanda, un esercizio.</a:t>
+Stato di apprendimento di questa lezione. DA COMPRENDERE OGGI: il sommatore; le funzioni booleane; le forme canoniche; minimizzazione, Karnaugh. DA UTILIZZARE OGGI: il programma completo, gli strumenti di PRG32 (si usa, non si studia, in questo corso). DA COMPRENDERE PIÙ AVANTI: niente. Una slide senza etichetta è contesto: una storia, un esempio, una domanda, un esercizio.
+Percorso. I risultati di oggi: (1) scrivere una funzione in forma canonica dalla sua tabella di verità; (2) minimizzare una funzione di al più quattro variabili con una mappa di Karnaugh; (3) costruire un sommatore completo e concatenarlo in un sommatore a n bit. Si appoggia su: solo ciò che ha preparato la Lezione 01. Prossimo passo: Lezione 10, Introduzione all'elettronica e all'elettronica digitale.</a:t>
             </a:r>
             <a:endParaRPr lang="en-US" dirty="0"/>
           </a:p>
